--- a/public/fun/pack/pptx/familypro/가족소개프리미엄_36_우리부부_앰버스모크.pptx
+++ b/public/fun/pack/pptx/familypro/가족소개프리미엄_36_우리부부_앰버스모크.pptx
@@ -113,12 +113,12 @@
   <p:extLst>
     <p:ext uri="{521415D9-36F7-43E2-AB2F-B90AF26B5E84}">
       <p14:sectionLst xmlns:p14="http://schemas.microsoft.com/office/powerpoint/2010/main">
-        <p14:section name="시작" id="{FE36D92F-932C-446F-9B5B-48B081ECED89}">
+        <p14:section name="시작" id="{B06CCF9D-B343-41B0-A423-220632B278E2}">
           <p14:sldIdLst>
             <p14:sldId id="256"/>
           </p14:sldIdLst>
         </p14:section>
-        <p14:section name="본문" id="{6587E62F-B5C6-43E9-9EF2-29F51FD66578}">
+        <p14:section name="본문" id="{4B41519E-2FBF-4E13-A967-1D20A4FC6EEC}">
           <p14:sldIdLst>
             <p14:sldId id="257"/>
             <p14:sldId id="258"/>
@@ -127,7 +127,7 @@
             <p14:sldId id="261"/>
           </p14:sldIdLst>
         </p14:section>
-        <p14:section name="마무리" id="{A1A3E6A1-A137-4CA5-8933-98374619AA9B}">
+        <p14:section name="마무리" id="{29465D59-D72E-4EE6-81FB-CE2C9A7AD177}">
           <p14:sldIdLst>
             <p14:sldId id="262"/>
           </p14:sldIdLst>
@@ -1545,7 +1545,7 @@
             </a:lvl1pPr>
           </a:lstStyle>
           <a:p>
-            <a:fld id="{66D7F78A-03F2-4A59-9B0D-CD495327534A}" type="slidenum">
+            <a:fld id="{652D1974-6691-4AD0-B77E-9ABAC1696AA1}" type="slidenum">
               <a:rPr lang="en-US"/>
               <a:t>‹#›</a:t>
             </a:fld>
@@ -2242,7 +2242,7 @@
             </a:lvl1pPr>
           </a:lstStyle>
           <a:p>
-            <a:fld id="{C0EF114B-EC9D-4893-B83C-D13EF67E5663}" type="slidenum">
+            <a:fld id="{8A2BC22C-64B1-4C88-A347-836380728ED8}" type="slidenum">
               <a:rPr lang="en-US"/>
               <a:t>‹#›</a:t>
             </a:fld>
@@ -2912,7 +2912,7 @@
             </a:lvl1pPr>
           </a:lstStyle>
           <a:p>
-            <a:fld id="{D2384D97-51E8-4CB4-9BB5-5FB5EC9306E4}" type="slidenum">
+            <a:fld id="{83A958D6-098D-4891-9039-ABA86B2417E9}" type="slidenum">
               <a:rPr lang="en-US"/>
               <a:t>‹#›</a:t>
             </a:fld>
@@ -3775,7 +3775,7 @@
           <a:p>
             <a:r>
               <a:rPr lang="ko-KR"/>
-              <a:t>서리 낀 들판을 걷던 아침</a:t>
+              <a:t>하얀 들판을 걷던 아침</a:t>
             </a:r>
           </a:p>
         </p:txBody>
@@ -3797,7 +3797,7 @@
           <a:p>
             <a:r>
               <a:rPr lang="ko-KR"/>
-              <a:t>우리 부부 · 0000. 00. 00</a:t>
+              <a:t>우리 부부 · 날짜 입력</a:t>
             </a:r>
           </a:p>
         </p:txBody>
@@ -4018,7 +4018,7 @@
           <a:bodyPr/>
           <a:lstStyle/>
           <a:p>
-            <a:fld id="{8618BA3C-1B56-438E-9245-6EFD10B6FBCE}" type="slidenum">
+            <a:fld id="{6E46483F-4A2D-49D4-967F-A5DD31D6909C}" type="slidenum">
               <a:rPr lang="en-US"/>
               <a:t>‹#›</a:t>
             </a:fld>
@@ -4420,7 +4420,7 @@
           <a:bodyPr/>
           <a:lstStyle/>
           <a:p>
-            <a:fld id="{359789B7-6F8B-4594-9CED-BCB69BB6DE73}" type="slidenum">
+            <a:fld id="{45AE79F8-CD8C-4015-8D99-82043C0B37CF}" type="slidenum">
               <a:rPr lang="en-US"/>
               <a:t>‹#›</a:t>
             </a:fld>
@@ -5395,7 +5395,7 @@
           <a:bodyPr/>
           <a:lstStyle/>
           <a:p>
-            <a:fld id="{2E485197-79A9-4154-A56B-D72A2AB30C50}" type="slidenum">
+            <a:fld id="{048173E6-1983-4AFF-98F6-6955D63EEE6A}" type="slidenum">
               <a:rPr lang="en-US"/>
               <a:t>‹#›</a:t>
             </a:fld>
@@ -6683,7 +6683,7 @@
           <a:bodyPr/>
           <a:lstStyle/>
           <a:p>
-            <a:fld id="{25F69AAE-0B6D-4E3C-B38A-7B48D13BFB1C}" type="slidenum">
+            <a:fld id="{869ABCA4-C316-4404-BA66-BAB381A2BDDB}" type="slidenum">
               <a:rPr lang="en-US"/>
               <a:t>‹#›</a:t>
             </a:fld>
@@ -6771,7 +6771,7 @@
           <a:bodyPr/>
           <a:lstStyle/>
           <a:p>
-            <a:fld id="{67A6F02B-448D-4548-9D26-DAA364A4E4D9}" type="slidenum">
+            <a:fld id="{D1D8CC13-F756-4C1C-96FA-F725928BE6F3}" type="slidenum">
               <a:rPr lang="en-US"/>
               <a:t>‹#›</a:t>
             </a:fld>
